--- a/slides/cidl_2026.pptx
+++ b/slides/cidl_2026.pptx
@@ -3400,8 +3400,10 @@
               <a:t> </a:t>
             </a:r>
             <a:r>
-              <a:rPr i="1"/>
-              <a:t>Zenodo DOI: pending</a:t>
+              <a:rPr>
+                <a:hlinkClick r:id="rId4"/>
+              </a:rPr>
+              <a:t>10.5281/zenodo.20439182</a:t>
             </a:r>
           </a:p>
         </p:txBody>
@@ -4618,8 +4620,10 @@
               <a:t> </a:t>
             </a:r>
             <a:r>
-              <a:rPr i="1"/>
-              <a:t>Zenodo DOI: pending</a:t>
+              <a:rPr>
+                <a:hlinkClick r:id="rId2"/>
+              </a:rPr>
+              <a:t>10.5281/zenodo.20439182</a:t>
             </a:r>
             <a:r>
               <a:rPr/>
@@ -4638,7 +4642,7 @@
             </a:r>
             <a:r>
               <a:rPr>
-                <a:hlinkClick r:id="rId2"/>
+                <a:hlinkClick r:id="rId3"/>
               </a:rPr>
               <a:t>athdgc.github.io</a:t>
             </a:r>

--- a/slides/cidl_2026.pptx
+++ b/slides/cidl_2026.pptx
@@ -3450,7 +3450,7 @@
             </a:pPr>
             <a:r>
               <a:rPr/>
-              <a:t>AthDGC — Athens-PROIEL</a:t>
+              <a:t>AthDGC - Athens-PROIEL</a:t>
             </a:r>
           </a:p>
         </p:txBody>
@@ -4178,7 +4178,7 @@
             </a:r>
             <a:r>
               <a:rPr/>
-              <a:t> (Vulgate) — 6,861 verses aligned</a:t>
+              <a:t> (Vulgate) - 6,861 verses aligned</a:t>
             </a:r>
           </a:p>
           <a:p>
@@ -4189,7 +4189,7 @@
             </a:r>
             <a:r>
               <a:rPr/>
-              <a:t> (Wulfila) — </a:t>
+              <a:t> (Wulfila) - </a:t>
             </a:r>
             <a:r>
               <a:rPr i="1"/>
@@ -4204,7 +4204,7 @@
             </a:r>
             <a:r>
               <a:rPr/>
-              <a:t> (Marianus) — </a:t>
+              <a:t> (Marianus) - </a:t>
             </a:r>
             <a:r>
               <a:rPr i="1"/>
@@ -4219,7 +4219,7 @@
             </a:r>
             <a:r>
               <a:rPr/>
-              <a:t> — PROIEL-style pipeline in development</a:t>
+              <a:t> - PROIEL-style pipeline in development</a:t>
             </a:r>
           </a:p>
           <a:p>

--- a/slides/cidl_2026.pptx
+++ b/slides/cidl_2026.pptx
@@ -16,6 +16,7 @@
     <p:sldId id="264" r:id="rId10"/>
     <p:sldId id="265" r:id="rId11"/>
     <p:sldId id="266" r:id="rId12"/>
+    <p:sldId id="267" r:id="rId13"/>
   </p:sldIdLst>
   <p:sldSz cx="9144000" cy="5143500" type="screen16x9"/>
   <p:notesSz cx="6858000" cy="9144000"/>
@@ -3404,6 +3405,120 @@
                 <a:hlinkClick r:id="rId4"/>
               </a:rPr>
               <a:t>10.5281/zenodo.20439182</a:t>
+            </a:r>
+          </a:p>
+        </p:txBody>
+      </p:sp>
+    </p:spTree>
+  </p:cSld>
+</p:sld>
+</file>
+
+<file path=ppt/slides/slide12.xml><?xml version="1.0" encoding="utf-8"?>
+<p:sld xmlns:a="http://schemas.openxmlformats.org/drawingml/2006/main" xmlns:r="http://schemas.openxmlformats.org/officeDocument/2006/relationships" xmlns:p="http://schemas.openxmlformats.org/presentationml/2006/main">
+  <p:cSld>
+    <p:spTree>
+      <p:nvGrpSpPr>
+        <p:cNvPr id="1" name=""/>
+        <p:cNvGrpSpPr/>
+        <p:nvPr/>
+      </p:nvGrpSpPr>
+      <p:grpSpPr>
+        <a:xfrm>
+          <a:off x="0" y="0"/>
+          <a:ext cx="0" cy="0"/>
+          <a:chOff x="0" y="0"/>
+          <a:chExt cx="0" cy="0"/>
+        </a:xfrm>
+      </p:grpSpPr>
+      <p:sp>
+        <p:nvSpPr>
+          <p:cNvPr id="2" name="Title 1"/>
+          <p:cNvSpPr>
+            <a:spLocks noGrp="1"/>
+          </p:cNvSpPr>
+          <p:nvPr>
+            <p:ph type="title"/>
+          </p:nvPr>
+        </p:nvSpPr>
+        <p:spPr/>
+        <p:txBody>
+          <a:bodyPr/>
+          <a:lstStyle/>
+          <a:p>
+            <a:pPr lvl="0" indent="0" marL="0">
+              <a:buNone/>
+            </a:pPr>
+            <a:r>
+              <a:rPr/>
+              <a:t>Funding</a:t>
+            </a:r>
+          </a:p>
+        </p:txBody>
+      </p:sp>
+      <p:sp>
+        <p:nvSpPr>
+          <p:cNvPr id="3" name="Content Placeholder 2"/>
+          <p:cNvSpPr>
+            <a:spLocks noGrp="1"/>
+          </p:cNvSpPr>
+          <p:nvPr>
+            <p:ph idx="1"/>
+          </p:nvPr>
+        </p:nvSpPr>
+        <p:spPr/>
+        <p:txBody>
+          <a:bodyPr/>
+          <a:lstStyle/>
+          <a:p>
+            <a:pPr lvl="0" indent="0" marL="0">
+              <a:buNone/>
+            </a:pPr>
+            <a:r>
+              <a:rPr/>
+              <a:t>Funded by the </a:t>
+            </a:r>
+            <a:r>
+              <a:rPr b="1"/>
+              <a:t>Hellenic Foundation for Research and Innovation (HFRI)</a:t>
+            </a:r>
+            <a:r>
+              <a:rPr/>
+              <a:t> under the 3rd Call for HFRI Research Projects to support Post-Doctoral Researchers, </a:t>
+            </a:r>
+            <a:r>
+              <a:rPr b="1"/>
+              <a:t>Project No. 20577</a:t>
+            </a:r>
+            <a:r>
+              <a:rPr/>
+              <a:t>; with complementary support from the </a:t>
+            </a:r>
+            <a:r>
+              <a:rPr b="1"/>
+              <a:t>Greece 2.0 National Recovery and Resilience Plan</a:t>
+            </a:r>
+            <a:r>
+              <a:rPr/>
+              <a:t>. Compute supplied by </a:t>
+            </a:r>
+            <a:r>
+              <a:rPr b="1"/>
+              <a:t>GRNET ARIS</a:t>
+            </a:r>
+            <a:r>
+              <a:rPr/>
+              <a:t> (Greek national HPC), allocation </a:t>
+            </a:r>
+            <a:r>
+              <a:rPr>
+                <a:latin typeface="Courier"/>
+              </a:rPr>
+              <a:t>pa260305</a:t>
+            </a:r>
+            <a:r>
+              <a:rPr/>
+              <a:t>.</a:t>
             </a:r>
           </a:p>
         </p:txBody>

--- a/slides/cidl_2026.pptx
+++ b/slides/cidl_2026.pptx
@@ -4856,7 +4856,7 @@
             </a:r>
             <a:r>
               <a:rPr/>
-              <a:t> Nikolaos Lavidas (EKPA) </a:t>
+              <a:t> Nikolaos Lavidas (NKUA) </a:t>
             </a:r>
             <a:r>
               <a:rPr b="1"/>
@@ -4868,7 +4868,7 @@
             </a:r>
             <a:r>
               <a:rPr b="1"/>
-              <a:t>EKPA:</a:t>
+              <a:t>NKUA:</a:t>
             </a:r>
             <a:r>
               <a:rPr/>

--- a/slides/cidl_2026.pptx
+++ b/slides/cidl_2026.pptx
@@ -4428,31 +4428,31 @@
               <a:rPr>
                 <a:latin typeface="Courier"/>
               </a:rPr>
-              <a:t>nsubj</a:t>
-            </a:r>
-            <a:r>
-              <a:rPr/>
-              <a:t>, </a:t>
+              <a:t>sub</a:t>
+            </a:r>
+            <a:r>
+              <a:rPr/>
+              <a:t>, including raised </a:t>
             </a:r>
             <a:r>
               <a:rPr>
                 <a:latin typeface="Courier"/>
               </a:rPr>
-              <a:t>nsubj:pass</a:t>
-            </a:r>
-            <a:r>
-              <a:rPr/>
-              <a:t>, </a:t>
+              <a:t>xobj</a:t>
+            </a:r>
+            <a:r>
+              <a:rPr/>
+              <a:t> / </a:t>
             </a:r>
             <a:r>
               <a:rPr>
                 <a:latin typeface="Courier"/>
               </a:rPr>
-              <a:t>csubj</a:t>
-            </a:r>
-            <a:r>
-              <a:rPr/>
-              <a:t>)</a:t>
+              <a:t>nonsub</a:t>
+            </a:r>
+            <a:r>
+              <a:rPr/>
+              <a:t> patterns)</a:t>
             </a:r>
           </a:p>
           <a:p>
@@ -4492,21 +4492,28 @@
               <a:rPr>
                 <a:latin typeface="Courier"/>
               </a:rPr>
-              <a:t>obl:arg</a:t>
-            </a:r>
-            <a:r>
-              <a:rPr/>
-              <a:t>, </a:t>
+              <a:t>obl</a:t>
+            </a:r>
+            <a:r>
+              <a:rPr/>
+              <a:t>)</a:t>
+            </a:r>
+          </a:p>
+          <a:p>
+            <a:pPr lvl="0"/>
+            <a:r>
+              <a:rPr/>
+              <a:t>vocative addressee (</a:t>
             </a:r>
             <a:r>
               <a:rPr>
                 <a:latin typeface="Courier"/>
               </a:rPr>
-              <a:t>obl:agent</a:t>
-            </a:r>
-            <a:r>
-              <a:rPr/>
-              <a:t>, …)</a:t>
+              <a:t>voc</a:t>
+            </a:r>
+            <a:r>
+              <a:rPr/>
+              <a:t>)</a:t>
             </a:r>
           </a:p>
           <a:p>

--- a/slides/cidl_2026.pptx
+++ b/slides/cidl_2026.pptx
@@ -4728,35 +4728,24 @@
             </a:r>
             <a:r>
               <a:rPr/>
-              <a:t> github.com/AthDGC/Diachronic-Linguistics-Platform (Apache-2.0)</a:t>
-            </a:r>
-          </a:p>
-          <a:p>
-            <a:pPr lvl="0"/>
-            <a:r>
-              <a:rPr b="1"/>
-              <a:t>Dataset DOI:</a:t>
-            </a:r>
-            <a:r>
-              <a:rPr/>
               <a:t> </a:t>
             </a:r>
             <a:r>
               <a:rPr>
                 <a:hlinkClick r:id="rId2"/>
               </a:rPr>
-              <a:t>10.5281/zenodo.20439182</a:t>
-            </a:r>
-            <a:r>
-              <a:rPr/>
-              <a:t> (CC-BY-4.0)</a:t>
+              <a:t>https://github.com/AthDGC/Diachronic-Linguistics-Platform</a:t>
+            </a:r>
+            <a:r>
+              <a:rPr/>
+              <a:t> (Apache-2.0)</a:t>
             </a:r>
           </a:p>
           <a:p>
             <a:pPr lvl="0"/>
             <a:r>
               <a:rPr b="1"/>
-              <a:t>Showcase:</a:t>
+              <a:t>Dataset DOI:</a:t>
             </a:r>
             <a:r>
               <a:rPr/>
@@ -4766,6 +4755,27 @@
               <a:rPr>
                 <a:hlinkClick r:id="rId3"/>
               </a:rPr>
+              <a:t>10.5281/zenodo.20439182</a:t>
+            </a:r>
+            <a:r>
+              <a:rPr/>
+              <a:t> (CC-BY-4.0)</a:t>
+            </a:r>
+          </a:p>
+          <a:p>
+            <a:pPr lvl="0"/>
+            <a:r>
+              <a:rPr b="1"/>
+              <a:t>Showcase:</a:t>
+            </a:r>
+            <a:r>
+              <a:rPr/>
+              <a:t> </a:t>
+            </a:r>
+            <a:r>
+              <a:rPr>
+                <a:hlinkClick r:id="rId4"/>
+              </a:rPr>
               <a:t>athdgc.github.io</a:t>
             </a:r>
           </a:p>
@@ -4773,7 +4783,28 @@
             <a:pPr lvl="0"/>
             <a:r>
               <a:rPr b="1"/>
-              <a:t>Hugging Face dataset:</a:t>
+              <a:t>Hugging Face checkpoints:</a:t>
+            </a:r>
+            <a:r>
+              <a:rPr/>
+              <a:t> mirror at </a:t>
+            </a:r>
+            <a:r>
+              <a:rPr>
+                <a:hlinkClick r:id="rId5"/>
+              </a:rPr>
+              <a:t>https://huggingface.co/AthDGC</a:t>
+            </a:r>
+            <a:r>
+              <a:rPr/>
+              <a:t> in setup; ships at v0.5</a:t>
+            </a:r>
+          </a:p>
+          <a:p>
+            <a:pPr lvl="0"/>
+            <a:r>
+              <a:rPr b="1"/>
+              <a:t>Launch report:</a:t>
             </a:r>
             <a:r>
               <a:rPr/>
@@ -4781,13 +4812,9 @@
             </a:r>
             <a:r>
               <a:rPr>
-                <a:latin typeface="Courier"/>
+                <a:hlinkClick r:id="rId6"/>
               </a:rPr>
-              <a:t>athdgc/diachronic-greek-corpus</a:t>
-            </a:r>
-            <a:r>
-              <a:rPr/>
-              <a:t> (forthcoming)</a:t>
+              <a:t>GlossaContactLab Working Papers, NKUA digital edition</a:t>
             </a:r>
           </a:p>
         </p:txBody>
@@ -4863,7 +4890,7 @@
             </a:r>
             <a:r>
               <a:rPr/>
-              <a:t> Nikolaos Lavidas (NKUA) </a:t>
+              <a:t> Prof. Nikolaos Lavidas (NKUA) </a:t>
             </a:r>
             <a:r>
               <a:rPr b="1"/>
@@ -4871,7 +4898,7 @@
             </a:r>
             <a:r>
               <a:rPr/>
-              <a:t> Dag Haug (Oslo, PROIEL Director), Leonid Kulikov (Ghent) </a:t>
+              <a:t> Prof. Dag Haug (Oslo, PROIEL Project Director); Prof. Leonid Kulikov (Ghent; Diachronic typology, valency questionnaires) </a:t>
             </a:r>
             <a:r>
               <a:rPr b="1"/>
@@ -4879,7 +4906,7 @@
             </a:r>
             <a:r>
               <a:rPr/>
-              <a:t> Kiki Nikiforidou, Vassiliki Geka, Vassileios Symeonidis, Theodoros Michalareas, Sofia Chionidi, Anastasia Tsiropina, Eleni Plakoutsi, Evangelos Argyropoulos</a:t>
+              <a:t> Prof. Emerita Kiki Nikiforidou; Dr. Vassiliki Geka, Dr. Vassileios Symeonidis, Dr. Theodoros Michalareas (Post-Doctoral Researchers); Sofia Chionidi, Anastasia Tsiropina, Eleni Plakoutsi (PhD Candidates); Evangelos Argyropoulos (Research Assistant); Athens Digital Glossa Chronos Research Network (collective author)</a:t>
             </a:r>
           </a:p>
           <a:p>

--- a/slides/cidl_2026.pptx
+++ b/slides/cidl_2026.pptx
@@ -3277,7 +3277,7 @@
             </a:pPr>
             <a:r>
               <a:rPr/>
-              <a:t>Pull period-specific JSONL partitions from Hugging Face</a:t>
+              <a:t>Pull period-specific JSONL (a plain-text data format that stores one record per line) partitions from Hugging Face</a:t>
             </a:r>
           </a:p>
           <a:p>
@@ -3286,7 +3286,7 @@
             </a:pPr>
             <a:r>
               <a:rPr/>
-              <a:t>Browse the PROIEL XML 2.0 samples on </a:t>
+              <a:t>Browse the PROIEL XML 2.0 (the file format that stores each sentence as a tree of word-by-word grammatical relations, developed at Oslo) samples on </a:t>
             </a:r>
             <a:r>
               <a:rPr>
@@ -3508,7 +3508,7 @@
             </a:r>
             <a:r>
               <a:rPr/>
-              <a:t> (Greek national HPC), allocation </a:t>
+              <a:t> (Greek national HPC (high-performance computing, i.e. a cluster of fast machines used for heavy computation)), allocation </a:t>
             </a:r>
             <a:r>
               <a:rPr>
@@ -3565,7 +3565,7 @@
             </a:pPr>
             <a:r>
               <a:rPr/>
-              <a:t>AthDGC - Athens-PROIEL</a:t>
+              <a:t>AthDGC - Athens-PROIEL (the dependency-treebank (a collection of sentences whose grammatical structure has been analysed and stored) standard for early Indo-European languages, developed at Oslo)</a:t>
             </a:r>
           </a:p>
         </p:txBody>
@@ -3590,7 +3590,7 @@
             </a:pPr>
             <a:r>
               <a:rPr/>
-              <a:t>Diachronic Greek treebank · Indo-European cross-lingual alignment Athens Digital Glossa Chronos Research Network</a:t>
+              <a:t>Diachronic Greek treebank · Indo-European cross-lingual alignment (matching corresponding words or sentences between texts in different languages) Athens Digital Glossa Chronos Research Network</a:t>
             </a:r>
           </a:p>
           <a:p>
@@ -3699,7 +3699,7 @@
             <a:pPr lvl="0"/>
             <a:r>
               <a:rPr/>
-              <a:t>machine-queryable argument structure</a:t>
+              <a:t>machine-queryable argument structure (the set of obligatory and optional partners a verb requires, e.g. subject, object, oblique)</a:t>
             </a:r>
           </a:p>
           <a:p>
@@ -4343,7 +4343,7 @@
             </a:pPr>
             <a:r>
               <a:rPr/>
-              <a:t>Method: LaBSE sentence embedding + AwesomeAlign word-level (mBERT attention).</a:t>
+              <a:t>Method: LaBSE (a multilingual sentence-embedding model that maps sentences from many languages into a common vector space) sentence embedding (a numeric vector that represents the meaning of a sentence) + AwesomeAlign (a word-alignment procedure that uses multilingual-BERT attention to match words across translations) word-level (mBERT attention).</a:t>
             </a:r>
           </a:p>
         </p:txBody>
@@ -4624,7 +4624,7 @@
             </a:pPr>
             <a:r>
               <a:rPr/>
-              <a:t>Translates to a Neo4j Cypher query traversing the </a:t>
+              <a:t>Translates to a Neo4j (a graph database that stores data as nodes and connections rather than as tables) Cypher query traversing the </a:t>
             </a:r>
             <a:r>
               <a:rPr>
@@ -4738,14 +4738,14 @@
             </a:r>
             <a:r>
               <a:rPr/>
-              <a:t> (Apache-2.0)</a:t>
+              <a:t> (Apache-2.0 (a permissive open-source licence widely used for software))</a:t>
             </a:r>
           </a:p>
           <a:p>
             <a:pPr lvl="0"/>
             <a:r>
               <a:rPr b="1"/>
-              <a:t>Dataset DOI:</a:t>
+              <a:t>Dataset DOI (Digital Object Identifier, a permanent web link for a published artefact):</a:t>
             </a:r>
             <a:r>
               <a:rPr/>
@@ -4755,11 +4755,11 @@
               <a:rPr>
                 <a:hlinkClick r:id="rId3"/>
               </a:rPr>
-              <a:t>10.5281/zenodo.20439182</a:t>
-            </a:r>
-            <a:r>
-              <a:rPr/>
-              <a:t> (CC-BY-4.0)</a:t>
+              <a:t>10.5281/zenodo (an open research-data repository hosted at CERN that mints permanent DOIs).20439182</a:t>
+            </a:r>
+            <a:r>
+              <a:rPr/>
+              <a:t> (CC-BY-4.0 (the Creative Commons Attribution 4.0 licence, which permits reuse with credit))</a:t>
             </a:r>
           </a:p>
           <a:p>
@@ -4783,7 +4783,7 @@
             <a:pPr lvl="0"/>
             <a:r>
               <a:rPr b="1"/>
-              <a:t>Hugging Face checkpoints:</a:t>
+              <a:t>Hugging Face (a public hosting platform for machine-learning models and datasets) checkpoints (saved snapshots of a trained model):</a:t>
             </a:r>
             <a:r>
               <a:rPr/>
@@ -4898,7 +4898,7 @@
             </a:r>
             <a:r>
               <a:rPr/>
-              <a:t> Prof. Dag Haug (Oslo, PROIEL Project Director); Prof. Leonid Kulikov (Ghent; Diachronic typology, valency questionnaires) </a:t>
+              <a:t> Prof. Dag Haug (Oslo, PROIEL Project Director); Prof. Leonid Kulikov (Ghent; Diachronic typology, valency (the number and type of arguments a verb takes) questionnaires) </a:t>
             </a:r>
             <a:r>
               <a:rPr b="1"/>
@@ -4915,7 +4915,7 @@
             </a:pPr>
             <a:r>
               <a:rPr/>
-              <a:t>Funded by HFRI (Project No. 20577) · Greece 2.0 NRRP Compute: GRNET ARIS (pa260305)</a:t>
+              <a:t>Funded by HFRI (Project No. 20577) · Greece 2.0 NRRP Compute: GRNET ARIS (the Greek national high-performance computing cluster, run by GRNET) (pa260305)</a:t>
             </a:r>
           </a:p>
         </p:txBody>

--- a/slides/cidl_2026.pptx
+++ b/slides/cidl_2026.pptx
@@ -4906,7 +4906,7 @@
             </a:r>
             <a:r>
               <a:rPr/>
-              <a:t> Prof. Emerita Kiki Nikiforidou; Dr. Vassiliki Geka, Dr. Vassileios Symeonidis, Dr. Theodoros Michalareas (Post-Doctoral Researchers); Sofia Chionidi, Anastasia Tsiropina, Eleni Plakoutsi (PhD Candidates); Evangelos Argyropoulos (Research Assistant); Athens Digital Glossa Chronos Research Network (collective author)</a:t>
+              <a:t> Prof. Emerita Kiki Nikiforidou; Dr. Vassiliki Geka, Dr. Vassileios Symeonidis, Dr. Theodoros Michalareas (Post-Doctoral Researchers); Sofia Chionidi, Anastasia Tsiropina, Eleni Plakoutsi (PhD Candidates); Evangelos Argyropoulos (Research Assistant)</a:t>
             </a:r>
           </a:p>
           <a:p>

--- a/slides/cidl_2026.pptx
+++ b/slides/cidl_2026.pptx
@@ -4293,7 +4293,7 @@
             </a:r>
             <a:r>
               <a:rPr/>
-              <a:t> (Vulgate) - 6,861 verses aligned</a:t>
+              <a:t> (Vulgate) - Clementine Vulgate NT aligned</a:t>
             </a:r>
           </a:p>
           <a:p>

--- a/slides/cidl_2026.pptx
+++ b/slides/cidl_2026.pptx
@@ -3565,7 +3565,7 @@
             </a:pPr>
             <a:r>
               <a:rPr/>
-              <a:t>AthDGC - Athens-PROIEL (the dependency-treebank (a collection of sentences whose grammatical structure has been analysed and stored) standard for early Indo-European languages, developed at Oslo)</a:t>
+              <a:t>AthDGC, Athens-PROIEL (the dependency-treebank (a collection of sentences whose grammatical structure has been analysed and stored) standard for early Indo-European languages, developed at Oslo)</a:t>
             </a:r>
           </a:p>
         </p:txBody>
@@ -4293,7 +4293,7 @@
             </a:r>
             <a:r>
               <a:rPr/>
-              <a:t> (Vulgate) - Clementine Vulgate NT aligned</a:t>
+              <a:t> (Vulgate), Clementine Vulgate NT aligned</a:t>
             </a:r>
           </a:p>
           <a:p>
@@ -4304,7 +4304,7 @@
             </a:r>
             <a:r>
               <a:rPr/>
-              <a:t> (Wulfila) - </a:t>
+              <a:t> (Wulfila), </a:t>
             </a:r>
             <a:r>
               <a:rPr i="1"/>
@@ -4319,7 +4319,7 @@
             </a:r>
             <a:r>
               <a:rPr/>
-              <a:t> (Marianus) - </a:t>
+              <a:t> (Marianus), </a:t>
             </a:r>
             <a:r>
               <a:rPr i="1"/>
@@ -4334,7 +4334,7 @@
             </a:r>
             <a:r>
               <a:rPr/>
-              <a:t> - PROIEL-style pipeline in development</a:t>
+              <a:t>, PROIEL-style workflow in development</a:t>
             </a:r>
           </a:p>
           <a:p>

--- a/slides/cidl_2026.pptx
+++ b/slides/cidl_2026.pptx
@@ -4797,7 +4797,7 @@
             </a:r>
             <a:r>
               <a:rPr/>
-              <a:t> in setup; ships at v0.5</a:t>
+              <a:t> in setup; released at v0.5</a:t>
             </a:r>
           </a:p>
           <a:p>

--- a/slides/cidl_2026.pptx
+++ b/slides/cidl_2026.pptx
@@ -4755,7 +4755,7 @@
               <a:rPr>
                 <a:hlinkClick r:id="rId3"/>
               </a:rPr>
-              <a:t>10.5281/zenodo (an open research-data repository hosted at CERN that mints permanent DOIs).20439182</a:t>
+              <a:t>10.5281/zenodo.20439182</a:t>
             </a:r>
             <a:r>
               <a:rPr/>
